--- a/presentation/prometheus-badcamp-2026.pptx
+++ b/presentation/prometheus-badcamp-2026.pptx
@@ -2529,7 +2529,7 @@
                 <a:ea typeface="Arial Black" pitchFamily="34" charset="-122"/>
                 <a:cs typeface="Arial Black" pitchFamily="34" charset="-120"/>
               </a:rPr>
-              <a:t>15</a:t>
+              <a:t>10</a:t>
             </a:r>
             <a:endParaRPr lang="en-US" sz="5400" dirty="0"/>
           </a:p>
@@ -4117,7 +4117,7 @@
                 <a:ea typeface="Arial Black" pitchFamily="34" charset="-122"/>
                 <a:cs typeface="Arial Black" pitchFamily="34" charset="-120"/>
               </a:rPr>
-              <a:t>16</a:t>
+              <a:t>11</a:t>
             </a:r>
             <a:endParaRPr lang="en-US" sz="5400" dirty="0"/>
           </a:p>
@@ -4361,7 +4361,7 @@
                 <a:ea typeface="Arial Black" pitchFamily="34" charset="-122"/>
                 <a:cs typeface="Arial Black" pitchFamily="34" charset="-120"/>
               </a:rPr>
-              <a:t>06</a:t>
+              <a:t>12</a:t>
             </a:r>
             <a:endParaRPr lang="en-US" sz="5400" dirty="0"/>
           </a:p>
@@ -4875,7 +4875,7 @@
                 <a:ea typeface="Arial Black" pitchFamily="34" charset="-122"/>
                 <a:cs typeface="Arial Black" pitchFamily="34" charset="-120"/>
               </a:rPr>
-              <a:t>07</a:t>
+              <a:t>13</a:t>
             </a:r>
             <a:endParaRPr lang="en-US" sz="5400" dirty="0"/>
           </a:p>
@@ -5829,7 +5829,7 @@
                 <a:ea typeface="Arial Black" pitchFamily="34" charset="-122"/>
                 <a:cs typeface="Arial Black" pitchFamily="34" charset="-120"/>
               </a:rPr>
-              <a:t>09</a:t>
+              <a:t>14</a:t>
             </a:r>
             <a:endParaRPr lang="en-US" sz="5400" dirty="0"/>
           </a:p>
@@ -6547,7 +6547,7 @@
                 <a:ea typeface="Arial Black" pitchFamily="34" charset="-122"/>
                 <a:cs typeface="Arial Black" pitchFamily="34" charset="-120"/>
               </a:rPr>
-              <a:t>10</a:t>
+              <a:t>15</a:t>
             </a:r>
             <a:endParaRPr lang="en-US" sz="5400" dirty="0"/>
           </a:p>
@@ -7029,7 +7029,7 @@
                 <a:ea typeface="Arial Black" pitchFamily="34" charset="-122"/>
                 <a:cs typeface="Arial Black" pitchFamily="34" charset="-120"/>
               </a:rPr>
-              <a:t>11</a:t>
+              <a:t>16</a:t>
             </a:r>
             <a:endParaRPr lang="en-US" sz="5400" dirty="0"/>
           </a:p>
@@ -7795,7 +7795,7 @@
                 <a:ea typeface="Arial Black" pitchFamily="34" charset="-122"/>
                 <a:cs typeface="Arial Black" pitchFamily="34" charset="-120"/>
               </a:rPr>
-              <a:t>16</a:t>
+              <a:t>17</a:t>
             </a:r>
             <a:endParaRPr lang="en-US" sz="5400" dirty="0"/>
           </a:p>
@@ -8100,7 +8100,7 @@
                 <a:ea typeface="Arial Black" pitchFamily="34" charset="-122"/>
                 <a:cs typeface="Arial Black" pitchFamily="34" charset="-120"/>
               </a:rPr>
-              <a:t>17</a:t>
+              <a:t>18</a:t>
             </a:r>
             <a:endParaRPr lang="en-US" sz="5400" dirty="0"/>
           </a:p>
@@ -10221,7 +10221,7 @@
                 <a:ea typeface="Arial Black" pitchFamily="34" charset="-122"/>
                 <a:cs typeface="Arial Black" pitchFamily="34" charset="-120"/>
               </a:rPr>
-              <a:t>08</a:t>
+              <a:t>06</a:t>
             </a:r>
             <a:endParaRPr lang="en-US" sz="5400" dirty="0"/>
           </a:p>
@@ -10713,7 +10713,7 @@
                 <a:ea typeface="Arial Black" pitchFamily="34" charset="-122"/>
                 <a:cs typeface="Arial Black" pitchFamily="34" charset="-120"/>
               </a:rPr>
-              <a:t>12</a:t>
+              <a:t>07</a:t>
             </a:r>
             <a:endParaRPr lang="en-US" sz="5400" dirty="0"/>
           </a:p>
@@ -11539,7 +11539,7 @@
                 <a:ea typeface="Arial Black" pitchFamily="34" charset="-122"/>
                 <a:cs typeface="Arial Black" pitchFamily="34" charset="-120"/>
               </a:rPr>
-              <a:t>13</a:t>
+              <a:t>08</a:t>
             </a:r>
             <a:endParaRPr lang="en-US" sz="5400" dirty="0"/>
           </a:p>
@@ -12333,7 +12333,7 @@
                 <a:ea typeface="Arial Black" pitchFamily="34" charset="-122"/>
                 <a:cs typeface="Arial Black" pitchFamily="34" charset="-120"/>
               </a:rPr>
-              <a:t>14</a:t>
+              <a:t>09</a:t>
             </a:r>
             <a:endParaRPr lang="en-US" sz="5400" dirty="0"/>
           </a:p>

--- a/presentation/prometheus-badcamp-2026.pptx
+++ b/presentation/prometheus-badcamp-2026.pptx
@@ -2227,36 +2227,7 @@
               <a:buNone/>
             </a:pPr>
             <a:r>
-              <a:rPr lang="en-US" sz="2000" dirty="0">
-                <a:solidFill>
-                  <a:srgbClr val="0A0A0A"/>
-                </a:solidFill>
-                <a:latin typeface="Arial" pitchFamily="34" charset="0"/>
-                <a:ea typeface="Arial" pitchFamily="34" charset="-122"/>
-                <a:cs typeface="Arial" pitchFamily="34" charset="-120"/>
-              </a:rPr>
-              <a:t>Stealing fire from Pantheon*</a:t>
-            </a:r>
-          </a:p>
-          <a:p>
-            <a:pPr marL="0" indent="0">
-              <a:buNone/>
-            </a:pPr>
-            <a:endParaRPr lang="en-US" sz="2000" dirty="0">
-              <a:solidFill>
-                <a:srgbClr val="0A0A0A"/>
-              </a:solidFill>
-              <a:latin typeface="Arial" pitchFamily="34" charset="0"/>
-              <a:ea typeface="Arial" pitchFamily="34" charset="-122"/>
-              <a:cs typeface="Arial" pitchFamily="34" charset="-120"/>
-            </a:endParaRPr>
-          </a:p>
-          <a:p>
-            <a:pPr marL="0" indent="0">
-              <a:buNone/>
-            </a:pPr>
-            <a:r>
-              <a:rPr lang="en-US" sz="1600" i="1" dirty="0">
+              <a:rPr lang="en-US" sz="1600" dirty="0">
                 <a:solidFill>
                   <a:srgbClr val="0A0A0A"/>
                 </a:solidFill>
@@ -2266,7 +2237,7 @@
               </a:rPr>
               <a:t>Containerized Drupal hosting, so the next PHP security fix takes minutes instead of a day.</a:t>
             </a:r>
-            <a:endParaRPr lang="en-US" sz="1600" i="1" dirty="0"/>
+            <a:endParaRPr lang="en-US" sz="1600" dirty="0"/>
           </a:p>
         </p:txBody>
       </p:sp>
@@ -2306,91 +2277,6 @@
               <a:t>Jordan Koplowicz</a:t>
             </a:r>
             <a:endParaRPr lang="en-US" sz="1600" dirty="0"/>
-          </a:p>
-        </p:txBody>
-      </p:sp>
-      <p:sp>
-        <p:nvSpPr>
-          <p:cNvPr id="10" name="Shape 7">
-            <a:extLst>
-              <a:ext uri="{FF2B5EF4-FFF2-40B4-BE49-F238E27FC236}">
-                <a16:creationId xmlns:a16="http://schemas.microsoft.com/office/drawing/2014/main" id="{29E206F6-700A-6E49-50EA-191284164A48}"/>
-              </a:ext>
-            </a:extLst>
-          </p:cNvPr>
-          <p:cNvSpPr/>
-          <p:nvPr/>
-        </p:nvSpPr>
-        <p:spPr>
-          <a:xfrm>
-            <a:off x="2651760" y="5633720"/>
-            <a:ext cx="64008" cy="731520"/>
-          </a:xfrm>
-          <a:prstGeom prst="rect">
-            <a:avLst/>
-          </a:prstGeom>
-          <a:solidFill>
-            <a:srgbClr val="FF3300"/>
-          </a:solidFill>
-          <a:ln w="12700">
-            <a:solidFill>
-              <a:srgbClr val="FF3300"/>
-            </a:solidFill>
-            <a:prstDash val="solid"/>
-          </a:ln>
-        </p:spPr>
-        <p:txBody>
-          <a:bodyPr/>
-          <a:lstStyle/>
-          <a:p>
-            <a:endParaRPr lang="en-US" sz="1400"/>
-          </a:p>
-        </p:txBody>
-      </p:sp>
-      <p:sp>
-        <p:nvSpPr>
-          <p:cNvPr id="11" name="Text 8">
-            <a:extLst>
-              <a:ext uri="{FF2B5EF4-FFF2-40B4-BE49-F238E27FC236}">
-                <a16:creationId xmlns:a16="http://schemas.microsoft.com/office/drawing/2014/main" id="{41BC4208-C1D7-1C81-35ED-AA5A328494D6}"/>
-              </a:ext>
-            </a:extLst>
-          </p:cNvPr>
-          <p:cNvSpPr/>
-          <p:nvPr/>
-        </p:nvSpPr>
-        <p:spPr>
-          <a:xfrm>
-            <a:off x="2834640" y="5633720"/>
-            <a:ext cx="8869680" cy="731520"/>
-          </a:xfrm>
-          <a:prstGeom prst="rect">
-            <a:avLst/>
-          </a:prstGeom>
-          <a:solidFill>
-            <a:srgbClr val="FFF4F0"/>
-          </a:solidFill>
-          <a:ln/>
-        </p:spPr>
-        <p:txBody>
-          <a:bodyPr wrap="square" lIns="127000" tIns="127000" rIns="127000" bIns="127000" rtlCol="0" anchor="ctr"/>
-          <a:lstStyle/>
-          <a:p>
-            <a:pPr marL="0" indent="0">
-              <a:buNone/>
-            </a:pPr>
-            <a:r>
-              <a:rPr lang="en-US" sz="1400" i="1" dirty="0">
-                <a:solidFill>
-                  <a:srgbClr val="0A0A0A"/>
-                </a:solidFill>
-                <a:latin typeface="Arial" pitchFamily="34" charset="0"/>
-                <a:ea typeface="Arial" pitchFamily="34" charset="-122"/>
-                <a:cs typeface="Arial" pitchFamily="34" charset="-120"/>
-              </a:rPr>
-              <a:t>Disclaimer: I briefly worked for Pantheon in the marketing department.  I never worked on their hosting technology, and I am not privy to their secrets.  This architecture is much simpler and more primitive than what you can get from Pantheon, Acquia, or Platform.sh.</a:t>
-            </a:r>
-            <a:endParaRPr lang="en-US" sz="1400" dirty="0"/>
           </a:p>
         </p:txBody>
       </p:sp>
@@ -4400,7 +4286,7 @@
                 <a:ea typeface="Arial" pitchFamily="34" charset="-122"/>
                 <a:cs typeface="Arial" pitchFamily="34" charset="-120"/>
               </a:rPr>
-              <a:t>THE NEW ARCHITECTURE</a:t>
+              <a:t>Stealing fire from Pantheon*</a:t>
             </a:r>
             <a:endParaRPr lang="en-US" sz="1200" dirty="0"/>
           </a:p>
@@ -4661,14 +4547,20 @@
       </p:sp>
       <p:sp>
         <p:nvSpPr>
-          <p:cNvPr id="9" name="Shape 7"/>
-          <p:cNvSpPr/>
-          <p:nvPr/>
-        </p:nvSpPr>
-        <p:spPr>
-          <a:xfrm>
-            <a:off x="2651760" y="5394960"/>
-            <a:ext cx="64008" cy="822960"/>
+          <p:cNvPr id="11" name="Shape 7">
+            <a:extLst>
+              <a:ext uri="{FF2B5EF4-FFF2-40B4-BE49-F238E27FC236}">
+                <a16:creationId xmlns:a16="http://schemas.microsoft.com/office/drawing/2014/main" id="{4967A09F-8979-36C0-525A-607478CA1A52}"/>
+              </a:ext>
+            </a:extLst>
+          </p:cNvPr>
+          <p:cNvSpPr/>
+          <p:nvPr/>
+        </p:nvSpPr>
+        <p:spPr>
+          <a:xfrm>
+            <a:off x="2651760" y="5633720"/>
+            <a:ext cx="64008" cy="731520"/>
           </a:xfrm>
           <a:prstGeom prst="rect">
             <a:avLst/>
@@ -4687,20 +4579,26 @@
           <a:bodyPr/>
           <a:lstStyle/>
           <a:p>
-            <a:endParaRPr lang="en-US"/>
-          </a:p>
-        </p:txBody>
-      </p:sp>
-      <p:sp>
-        <p:nvSpPr>
-          <p:cNvPr id="10" name="Text 8"/>
-          <p:cNvSpPr/>
-          <p:nvPr/>
-        </p:nvSpPr>
-        <p:spPr>
-          <a:xfrm>
-            <a:off x="2834640" y="5394960"/>
-            <a:ext cx="8869680" cy="822960"/>
+            <a:endParaRPr lang="en-US" sz="1400"/>
+          </a:p>
+        </p:txBody>
+      </p:sp>
+      <p:sp>
+        <p:nvSpPr>
+          <p:cNvPr id="12" name="Text 8">
+            <a:extLst>
+              <a:ext uri="{FF2B5EF4-FFF2-40B4-BE49-F238E27FC236}">
+                <a16:creationId xmlns:a16="http://schemas.microsoft.com/office/drawing/2014/main" id="{DB62221A-160D-51FD-95A9-B72AAD76327B}"/>
+              </a:ext>
+            </a:extLst>
+          </p:cNvPr>
+          <p:cNvSpPr/>
+          <p:nvPr/>
+        </p:nvSpPr>
+        <p:spPr>
+          <a:xfrm>
+            <a:off x="2834640" y="5633720"/>
+            <a:ext cx="8869680" cy="731520"/>
           </a:xfrm>
           <a:prstGeom prst="rect">
             <a:avLst/>
@@ -4718,28 +4616,17 @@
               <a:buNone/>
             </a:pPr>
             <a:r>
-              <a:rPr lang="en-US" sz="1600" i="1" dirty="0">
-                <a:solidFill>
-                  <a:srgbClr val="0A0A0A"/>
-                </a:solidFill>
-                <a:latin typeface="Arial" pitchFamily="34" charset="0"/>
-                <a:ea typeface="Arial" pitchFamily="34" charset="-122"/>
-                <a:cs typeface="Arial" pitchFamily="34" charset="-120"/>
-              </a:rPr>
-              <a:t>Pantheon showed what good Drupal hosting feels like. Prometheus hands that fire to everyone: </a:t>
-            </a:r>
-            <a:r>
-              <a:rPr lang="en-US" sz="1600" b="1" i="1" dirty="0">
-                <a:solidFill>
-                  <a:srgbClr val="0A0A0A"/>
-                </a:solidFill>
-                <a:latin typeface="Arial" pitchFamily="34" charset="0"/>
-                <a:ea typeface="Arial" pitchFamily="34" charset="-122"/>
-                <a:cs typeface="Arial" pitchFamily="34" charset="-120"/>
-              </a:rPr>
-              <a:t>GPL-3.0, self-hosted, one VPS.</a:t>
-            </a:r>
-            <a:endParaRPr lang="en-US" sz="1600" dirty="0"/>
+              <a:rPr lang="en-US" sz="1400" i="1" dirty="0">
+                <a:solidFill>
+                  <a:srgbClr val="0A0A0A"/>
+                </a:solidFill>
+                <a:latin typeface="Arial" pitchFamily="34" charset="0"/>
+                <a:ea typeface="Arial" pitchFamily="34" charset="-122"/>
+                <a:cs typeface="Arial" pitchFamily="34" charset="-120"/>
+              </a:rPr>
+              <a:t>Disclaimer: I briefly worked for Pantheon, in the marketing department.  I never worked on their hosting technology, and I am not privy to their secrets.  This architecture is much simpler and more primitive than what you can get from Pantheon, Acquia, or Platform.sh.</a:t>
+            </a:r>
+            <a:endParaRPr lang="en-US" sz="1400" dirty="0"/>
           </a:p>
         </p:txBody>
       </p:sp>
@@ -7913,9 +7800,6 @@
           <a:bodyPr wrap="square" lIns="127000" tIns="127000" rIns="127000" bIns="127000" rtlCol="0" anchor="ctr"/>
           <a:lstStyle/>
           <a:p>
-            <a:pPr marL="0" indent="0">
-              <a:buNone/>
-            </a:pPr>
             <a:r>
               <a:rPr lang="en-US" sz="1600" i="1" dirty="0">
                 <a:solidFill>
@@ -7925,25 +7809,7 @@
                 <a:ea typeface="Arial" pitchFamily="34" charset="-122"/>
                 <a:cs typeface="Arial" pitchFamily="34" charset="-120"/>
               </a:rPr>
-              <a:t>Live demos </a:t>
-            </a:r>
-            <a:r>
-              <a:rPr lang="en-US" sz="1600" b="1" i="1" u="sng" dirty="0">
-                <a:solidFill>
-                  <a:srgbClr val="FF3300"/>
-                </a:solidFill>
-                <a:latin typeface="Arial" pitchFamily="34" charset="0"/>
-                <a:ea typeface="Arial" pitchFamily="34" charset="-122"/>
-                <a:cs typeface="Arial" pitchFamily="34" charset="-120"/>
-                <a:hlinkClick r:id="rId3">
-                  <a:extLst>
-                    <a:ext uri="{A12FA001-AC4F-418D-AE19-62706E023703}">
-                      <ahyp:hlinkClr xmlns:ahyp="http://schemas.microsoft.com/office/drawing/2018/hyperlinkcolor" val="tx"/>
-                    </a:ext>
-                  </a:extLst>
-                </a:hlinkClick>
-              </a:rPr>
-              <a:t>always work</a:t>
+              <a:t>In case it doesn’t work: </a:t>
             </a:r>
             <a:r>
               <a:rPr lang="en-US" sz="1600" i="1" dirty="0">
@@ -7953,8 +7819,20 @@
                 <a:latin typeface="Arial" pitchFamily="34" charset="0"/>
                 <a:ea typeface="Arial" pitchFamily="34" charset="-122"/>
                 <a:cs typeface="Arial" pitchFamily="34" charset="-120"/>
-              </a:rPr>
-              <a:t> (last year's recording)</a:t>
+                <a:hlinkClick r:id="rId3"/>
+              </a:rPr>
+              <a:t>https://youtu.be/FRIldVYCVGY</a:t>
+            </a:r>
+            <a:r>
+              <a:rPr lang="en-US" sz="1600" i="1" dirty="0">
+                <a:solidFill>
+                  <a:srgbClr val="0A0A0A"/>
+                </a:solidFill>
+                <a:latin typeface="Arial" pitchFamily="34" charset="0"/>
+                <a:ea typeface="Arial" pitchFamily="34" charset="-122"/>
+                <a:cs typeface="Arial" pitchFamily="34" charset="-120"/>
+              </a:rPr>
+              <a:t> </a:t>
             </a:r>
             <a:endParaRPr lang="en-US" sz="1600" dirty="0"/>
           </a:p>
@@ -8663,7 +8541,7 @@
                 <a:ea typeface="Arial Black" pitchFamily="34" charset="-122"/>
                 <a:cs typeface="Arial Black" pitchFamily="34" charset="-120"/>
               </a:rPr>
-              <a:t>The Plan</a:t>
+              <a:t>Outline</a:t>
             </a:r>
             <a:endParaRPr lang="en-US" sz="3600" dirty="0"/>
           </a:p>
@@ -8739,20 +8617,8 @@
                 <a:ea typeface="Arial" pitchFamily="34" charset="-122"/>
                 <a:cs typeface="Arial" pitchFamily="34" charset="-120"/>
               </a:rPr>
-              <a:t>Motivation</a:t>
-            </a:r>
-            <a:r>
-              <a:rPr lang="en-US" sz="2000" dirty="0">
-                <a:solidFill>
-                  <a:srgbClr val="0A0A0A"/>
-                </a:solidFill>
-                <a:latin typeface="Arial" pitchFamily="34" charset="0"/>
-                <a:ea typeface="Arial" pitchFamily="34" charset="-122"/>
-                <a:cs typeface="Arial" pitchFamily="34" charset="-120"/>
-              </a:rPr>
-              <a:t> — the PHP security outage of October 21</a:t>
-            </a:r>
-            <a:endParaRPr lang="en-US" sz="2000" dirty="0"/>
+              <a:t>What is Kubernetes?</a:t>
+            </a:r>
           </a:p>
           <a:p>
             <a:pPr marL="330200" indent="-330200">
@@ -8772,7 +8638,7 @@
                 <a:ea typeface="Arial" pitchFamily="34" charset="-122"/>
                 <a:cs typeface="Arial" pitchFamily="34" charset="-120"/>
               </a:rPr>
-              <a:t>Prometheus</a:t>
+              <a:t>Motivation</a:t>
             </a:r>
             <a:r>
               <a:rPr lang="en-US" sz="2000" dirty="0">
@@ -8783,7 +8649,7 @@
                 <a:ea typeface="Arial" pitchFamily="34" charset="-122"/>
                 <a:cs typeface="Arial" pitchFamily="34" charset="-120"/>
               </a:rPr>
-              <a:t> — the new architecture</a:t>
+              <a:t> — the PHP security outage of October 21</a:t>
             </a:r>
             <a:endParaRPr lang="en-US" sz="2000" dirty="0"/>
           </a:p>
@@ -8797,6 +8663,17 @@
               <a:buAutoNum type="arabicPeriod"/>
             </a:pPr>
             <a:r>
+              <a:rPr lang="en-US" sz="2000" b="1" dirty="0" err="1">
+                <a:solidFill>
+                  <a:srgbClr val="0A0A0A"/>
+                </a:solidFill>
+                <a:latin typeface="Arial" pitchFamily="34" charset="0"/>
+                <a:ea typeface="Arial" pitchFamily="34" charset="-122"/>
+                <a:cs typeface="Arial" pitchFamily="34" charset="-120"/>
+              </a:rPr>
+              <a:t>Dockerfiles</a:t>
+            </a:r>
+            <a:r>
               <a:rPr lang="en-US" sz="2000" b="1" dirty="0">
                 <a:solidFill>
                   <a:srgbClr val="0A0A0A"/>
@@ -8805,7 +8682,7 @@
                 <a:ea typeface="Arial" pitchFamily="34" charset="-122"/>
                 <a:cs typeface="Arial" pitchFamily="34" charset="-120"/>
               </a:rPr>
-              <a:t>Dockerfiles &amp; local dev</a:t>
+              <a:t> &amp; local dev</a:t>
             </a:r>
             <a:r>
               <a:rPr lang="en-US" sz="2000" dirty="0">
@@ -8838,7 +8715,7 @@
                 <a:ea typeface="Arial" pitchFamily="34" charset="-122"/>
                 <a:cs typeface="Arial" pitchFamily="34" charset="-120"/>
               </a:rPr>
-              <a:t>Deploying</a:t>
+              <a:t>Architectural considerations</a:t>
             </a:r>
             <a:r>
               <a:rPr lang="en-US" sz="2000" dirty="0">
@@ -8849,9 +8726,8 @@
                 <a:ea typeface="Arial" pitchFamily="34" charset="-122"/>
                 <a:cs typeface="Arial" pitchFamily="34" charset="-120"/>
               </a:rPr>
-              <a:t> — one bash script: prm</a:t>
-            </a:r>
-            <a:endParaRPr lang="en-US" sz="2000" dirty="0"/>
+              <a:t> — database &amp; persistent storage</a:t>
+            </a:r>
           </a:p>
           <a:p>
             <a:pPr marL="330200" indent="-330200">
@@ -8871,7 +8747,29 @@
                 <a:ea typeface="Arial" pitchFamily="34" charset="-122"/>
                 <a:cs typeface="Arial" pitchFamily="34" charset="-120"/>
               </a:rPr>
-              <a:t>Architectural considerations</a:t>
+              <a:t>Deploying</a:t>
+            </a:r>
+            <a:endParaRPr lang="en-US" sz="2000" dirty="0"/>
+          </a:p>
+          <a:p>
+            <a:pPr marL="330200" indent="-330200">
+              <a:spcAft>
+                <a:spcPts val="1000"/>
+              </a:spcAft>
+              <a:buSzPct val="100000"/>
+              <a:buFont typeface="+mj-lt"/>
+              <a:buAutoNum type="arabicPeriod"/>
+            </a:pPr>
+            <a:r>
+              <a:rPr lang="en-US" sz="2000" b="1" dirty="0">
+                <a:solidFill>
+                  <a:srgbClr val="0A0A0A"/>
+                </a:solidFill>
+                <a:latin typeface="Arial" pitchFamily="34" charset="0"/>
+                <a:ea typeface="Arial" pitchFamily="34" charset="-122"/>
+                <a:cs typeface="Arial" pitchFamily="34" charset="-120"/>
+              </a:rPr>
+              <a:t>Prometheus</a:t>
             </a:r>
             <a:r>
               <a:rPr lang="en-US" sz="2000" dirty="0">
@@ -8882,7 +8780,7 @@
                 <a:ea typeface="Arial" pitchFamily="34" charset="-122"/>
                 <a:cs typeface="Arial" pitchFamily="34" charset="-120"/>
               </a:rPr>
-              <a:t> — database &amp; persistent storage</a:t>
+              <a:t> — the new architecture</a:t>
             </a:r>
             <a:endParaRPr lang="en-US" sz="2000" dirty="0"/>
           </a:p>
